--- a/content/W02/D3/slides/C2_W02_D03_deck_STUDENT.pptx
+++ b/content/W02/D3/slides/C2_W02_D03_deck_STUDENT.pptx
@@ -3557,14 +3557,14 @@
       </p:sp>
       <p:pic>
         <p:nvPicPr>
-          <p:cNvPr id="7" name="Picture 6" descr="407123769cb25e01.png"/>
+          <p:cNvPr id="7" name="Picture 6" descr="611081d0845513e5.png"/>
           <p:cNvPicPr>
             <a:picLocks noChangeAspect="1"/>
           </p:cNvPicPr>
           <p:nvPr/>
         </p:nvPicPr>
         <p:blipFill>
-          <a:blip r:embed="rId2"/>
+          <a:blip r:embed="rId3"/>
           <a:stretch>
             <a:fillRect/>
           </a:stretch>
@@ -4184,14 +4184,14 @@
       </p:sp>
       <p:pic>
         <p:nvPicPr>
-          <p:cNvPr id="6" name="Picture 5" descr="055e7e7b4b88dbb2.png"/>
+          <p:cNvPr id="6" name="Picture 5" descr="61e2afefbbc651f0.png"/>
           <p:cNvPicPr>
             <a:picLocks noChangeAspect="1"/>
           </p:cNvPicPr>
           <p:nvPr/>
         </p:nvPicPr>
         <p:blipFill>
-          <a:blip r:embed="rId2"/>
+          <a:blip r:embed="rId3"/>
           <a:stretch>
             <a:fillRect/>
           </a:stretch>
@@ -5880,14 +5880,14 @@
       </p:sp>
       <p:pic>
         <p:nvPicPr>
-          <p:cNvPr id="6" name="Picture 5" descr="c5e62858e0bf99a9.png"/>
+          <p:cNvPr id="6" name="Picture 5" descr="5e8b04043f32b199.png"/>
           <p:cNvPicPr>
             <a:picLocks noChangeAspect="1"/>
           </p:cNvPicPr>
           <p:nvPr/>
         </p:nvPicPr>
         <p:blipFill>
-          <a:blip r:embed="rId2"/>
+          <a:blip r:embed="rId3"/>
           <a:stretch>
             <a:fillRect/>
           </a:stretch>
@@ -7613,14 +7613,14 @@
       </p:sp>
       <p:pic>
         <p:nvPicPr>
-          <p:cNvPr id="6" name="Picture 5" descr="fe47a658b9379461.png"/>
+          <p:cNvPr id="6" name="Picture 5" descr="b9bdb5ed9676d38d.png"/>
           <p:cNvPicPr>
             <a:picLocks noChangeAspect="1"/>
           </p:cNvPicPr>
           <p:nvPr/>
         </p:nvPicPr>
         <p:blipFill>
-          <a:blip r:embed="rId2"/>
+          <a:blip r:embed="rId3"/>
           <a:stretch>
             <a:fillRect/>
           </a:stretch>
@@ -9418,14 +9418,14 @@
       </p:sp>
       <p:pic>
         <p:nvPicPr>
-          <p:cNvPr id="6" name="Picture 5" descr="132bac0f68221a3d.png"/>
+          <p:cNvPr id="6" name="Picture 5" descr="8d928b8f31bf65b5.png"/>
           <p:cNvPicPr>
             <a:picLocks noChangeAspect="1"/>
           </p:cNvPicPr>
           <p:nvPr/>
         </p:nvPicPr>
         <p:blipFill>
-          <a:blip r:embed="rId2"/>
+          <a:blip r:embed="rId3"/>
           <a:stretch>
             <a:fillRect/>
           </a:stretch>
@@ -9787,14 +9787,14 @@
       </p:sp>
       <p:pic>
         <p:nvPicPr>
-          <p:cNvPr id="6" name="Picture 5" descr="46a847021f408ab1.png"/>
+          <p:cNvPr id="6" name="Picture 5" descr="464f9fa7dd5084d7.png"/>
           <p:cNvPicPr>
             <a:picLocks noChangeAspect="1"/>
           </p:cNvPicPr>
           <p:nvPr/>
         </p:nvPicPr>
         <p:blipFill>
-          <a:blip r:embed="rId2"/>
+          <a:blip r:embed="rId3"/>
           <a:stretch>
             <a:fillRect/>
           </a:stretch>
@@ -11757,14 +11757,14 @@
       </p:sp>
       <p:pic>
         <p:nvPicPr>
-          <p:cNvPr id="6" name="Picture 5" descr="8a6a939bbdf23eae.png"/>
+          <p:cNvPr id="6" name="Picture 5" descr="1c6071a3ac48deae.png"/>
           <p:cNvPicPr>
             <a:picLocks noChangeAspect="1"/>
           </p:cNvPicPr>
           <p:nvPr/>
         </p:nvPicPr>
         <p:blipFill>
-          <a:blip r:embed="rId2"/>
+          <a:blip r:embed="rId3"/>
           <a:stretch>
             <a:fillRect/>
           </a:stretch>
@@ -15242,14 +15242,14 @@
       </p:sp>
       <p:pic>
         <p:nvPicPr>
-          <p:cNvPr id="6" name="Picture 5" descr="b84efb9e4c5907b4.png"/>
+          <p:cNvPr id="6" name="Picture 5" descr="98a1ac13ed5f38c3.png"/>
           <p:cNvPicPr>
             <a:picLocks noChangeAspect="1"/>
           </p:cNvPicPr>
           <p:nvPr/>
         </p:nvPicPr>
         <p:blipFill>
-          <a:blip r:embed="rId2"/>
+          <a:blip r:embed="rId3"/>
           <a:stretch>
             <a:fillRect/>
           </a:stretch>
@@ -15645,14 +15645,14 @@
       </p:sp>
       <p:pic>
         <p:nvPicPr>
-          <p:cNvPr id="6" name="Picture 5" descr="5bd19412a976c1f0.png"/>
+          <p:cNvPr id="6" name="Picture 5" descr="a73ef6651b5fe9f3.png"/>
           <p:cNvPicPr>
             <a:picLocks noChangeAspect="1"/>
           </p:cNvPicPr>
           <p:nvPr/>
         </p:nvPicPr>
         <p:blipFill>
-          <a:blip r:embed="rId2"/>
+          <a:blip r:embed="rId3"/>
           <a:stretch>
             <a:fillRect/>
           </a:stretch>
